--- a/output/메이플스토리M_UA마케팅효율_분석보고서.pptx
+++ b/output/메이플스토리M_UA마케팅효율_분석보고서.pptx
@@ -1419,7 +1419,7 @@
               <c:strCache>
                 <c:ptCount val="1"/>
                 <c:pt idx="0">
-                  <c:v>검은사막모바일</c:v>
+                  <c:v>검은사막모바일(200위 클램프)</c:v>
                 </c:pt>
               </c:strCache>
             </c:strRef>
@@ -1610,7 +1610,7 @@
                   <c:v>155</c:v>
                 </c:pt>
                 <c:pt idx="25">
-                  <c:v>219</c:v>
+                  <c:v>200</c:v>
                 </c:pt>
                 <c:pt idx="26">
                   <c:v>198</c:v>
@@ -1622,22 +1622,34 @@
                   <c:v>168</c:v>
                 </c:pt>
                 <c:pt idx="29">
-                  <c:v>201</c:v>
+                  <c:v>200</c:v>
                 </c:pt>
                 <c:pt idx="30">
                   <c:v>198</c:v>
                 </c:pt>
                 <c:pt idx="31">
-                  <c:v>226</c:v>
+                  <c:v>200</c:v>
                 </c:pt>
                 <c:pt idx="32">
                   <c:v>182</c:v>
                 </c:pt>
                 <c:pt idx="33">
-                  <c:v>204</c:v>
+                  <c:v>200</c:v>
                 </c:pt>
                 <c:pt idx="34">
                   <c:v>159</c:v>
+                </c:pt>
+                <c:pt idx="35">
+                  <c:v>200</c:v>
+                </c:pt>
+                <c:pt idx="36">
+                  <c:v>200</c:v>
+                </c:pt>
+                <c:pt idx="37">
+                  <c:v>200</c:v>
+                </c:pt>
+                <c:pt idx="38">
+                  <c:v>200</c:v>
                 </c:pt>
               </c:numCache>
             </c:numRef>
@@ -1718,7 +1730,7 @@
         <c:axId val="2094734552"/>
         <c:scaling>
           <c:orientation val="minMax"/>
-          <c:max val="250"/>
+          <c:max val="200"/>
           <c:min val="0"/>
         </c:scaling>
         <c:delete val="0"/>
@@ -1755,7 +1767,7 @@
                     </a:solidFill>
                     <a:latin typeface="Arial"/>
                   </a:rPr>
-                  <a:t>순위(낮을수록 상위)</a:t>
+                  <a:t>순위(낮을수록 상위, 200=상한)</a:t>
                 </a:r>
               </a:p>
             </c:rich>
@@ -1792,7 +1804,7 @@
         <c:crossAx val="2094734554"/>
         <c:crosses val="autoZero"/>
         <c:crossBetween val="between"/>
-        <c:majorUnit val="50"/>
+        <c:majorUnit val="40"/>
       </c:valAx>
       <c:spPr>
         <a:noFill/>
@@ -2589,7 +2601,7 @@
               <c:strCache>
                 <c:ptCount val="1"/>
                 <c:pt idx="0">
-                  <c:v>검은사막모바일</c:v>
+                  <c:v>검은사막모바일(200위 클램프)</c:v>
                 </c:pt>
               </c:strCache>
             </c:strRef>
@@ -2704,8 +2716,17 @@
               <c:numCache>
                 <c:formatCode>General</c:formatCode>
                 <c:ptCount val="39"/>
+                <c:pt idx="0">
+                  <c:v>200</c:v>
+                </c:pt>
+                <c:pt idx="1">
+                  <c:v>200</c:v>
+                </c:pt>
+                <c:pt idx="2">
+                  <c:v>200</c:v>
+                </c:pt>
                 <c:pt idx="3">
-                  <c:v>269</c:v>
+                  <c:v>200</c:v>
                 </c:pt>
                 <c:pt idx="4">
                   <c:v>200</c:v>
@@ -2713,11 +2734,104 @@
                 <c:pt idx="5">
                   <c:v>199</c:v>
                 </c:pt>
+                <c:pt idx="6">
+                  <c:v>200</c:v>
+                </c:pt>
+                <c:pt idx="7">
+                  <c:v>200</c:v>
+                </c:pt>
+                <c:pt idx="8">
+                  <c:v>200</c:v>
+                </c:pt>
+                <c:pt idx="9">
+                  <c:v>200</c:v>
+                </c:pt>
+                <c:pt idx="10">
+                  <c:v>200</c:v>
+                </c:pt>
+                <c:pt idx="11">
+                  <c:v>200</c:v>
+                </c:pt>
+                <c:pt idx="12">
+                  <c:v>200</c:v>
+                </c:pt>
+                <c:pt idx="13">
+                  <c:v>200</c:v>
+                </c:pt>
+                <c:pt idx="14">
+                  <c:v>200</c:v>
+                </c:pt>
                 <c:pt idx="15">
                   <c:v>159</c:v>
                 </c:pt>
                 <c:pt idx="16">
                   <c:v>165</c:v>
+                </c:pt>
+                <c:pt idx="17">
+                  <c:v>200</c:v>
+                </c:pt>
+                <c:pt idx="18">
+                  <c:v>200</c:v>
+                </c:pt>
+                <c:pt idx="19">
+                  <c:v>200</c:v>
+                </c:pt>
+                <c:pt idx="20">
+                  <c:v>200</c:v>
+                </c:pt>
+                <c:pt idx="21">
+                  <c:v>200</c:v>
+                </c:pt>
+                <c:pt idx="22">
+                  <c:v>200</c:v>
+                </c:pt>
+                <c:pt idx="23">
+                  <c:v>200</c:v>
+                </c:pt>
+                <c:pt idx="24">
+                  <c:v>200</c:v>
+                </c:pt>
+                <c:pt idx="25">
+                  <c:v>200</c:v>
+                </c:pt>
+                <c:pt idx="26">
+                  <c:v>200</c:v>
+                </c:pt>
+                <c:pt idx="27">
+                  <c:v>200</c:v>
+                </c:pt>
+                <c:pt idx="28">
+                  <c:v>200</c:v>
+                </c:pt>
+                <c:pt idx="29">
+                  <c:v>200</c:v>
+                </c:pt>
+                <c:pt idx="30">
+                  <c:v>200</c:v>
+                </c:pt>
+                <c:pt idx="31">
+                  <c:v>200</c:v>
+                </c:pt>
+                <c:pt idx="32">
+                  <c:v>200</c:v>
+                </c:pt>
+                <c:pt idx="33">
+                  <c:v>200</c:v>
+                </c:pt>
+                <c:pt idx="34">
+                  <c:v>200</c:v>
+                </c:pt>
+                <c:pt idx="35">
+                  <c:v>200</c:v>
+                </c:pt>
+                <c:pt idx="36">
+                  <c:v>200</c:v>
+                </c:pt>
+                <c:pt idx="37">
+                  <c:v>200</c:v>
+                </c:pt>
+                <c:pt idx="38">
+                  <c:v>200</c:v>
                 </c:pt>
               </c:numCache>
             </c:numRef>
@@ -2798,7 +2912,7 @@
         <c:axId val="2094734552"/>
         <c:scaling>
           <c:orientation val="minMax"/>
-          <c:max val="120"/>
+          <c:max val="200"/>
           <c:min val="0"/>
         </c:scaling>
         <c:delete val="0"/>
@@ -2835,7 +2949,7 @@
                     </a:solidFill>
                     <a:latin typeface="Arial"/>
                   </a:rPr>
-                  <a:t>순위(낮을수록 상위)</a:t>
+                  <a:t>순위(낮을수록 상위, 200=상한)</a:t>
                 </a:r>
               </a:p>
             </c:rich>
@@ -2872,7 +2986,7 @@
         <c:crossAx val="2094734554"/>
         <c:crosses val="autoZero"/>
         <c:crossBetween val="between"/>
-        <c:majorUnit val="20"/>
+        <c:majorUnit val="40"/>
       </c:valAx>
       <c:spPr>
         <a:noFill/>
@@ -3669,7 +3783,7 @@
               <c:strCache>
                 <c:ptCount val="1"/>
                 <c:pt idx="0">
-                  <c:v>검은사막모바일</c:v>
+                  <c:v>검은사막모바일(200위 클램프)</c:v>
                 </c:pt>
               </c:strCache>
             </c:strRef>
@@ -3860,7 +3974,7 @@
                   <c:v>75</c:v>
                 </c:pt>
                 <c:pt idx="25">
-                  <c:v>137</c:v>
+                  <c:v>118</c:v>
                 </c:pt>
                 <c:pt idx="26">
                   <c:v>113</c:v>
@@ -3872,22 +3986,34 @@
                   <c:v>88</c:v>
                 </c:pt>
                 <c:pt idx="29">
-                  <c:v>113</c:v>
+                  <c:v>112</c:v>
                 </c:pt>
                 <c:pt idx="30">
                   <c:v>112</c:v>
                 </c:pt>
                 <c:pt idx="31">
-                  <c:v>135</c:v>
+                  <c:v>109</c:v>
                 </c:pt>
                 <c:pt idx="32">
                   <c:v>84</c:v>
                 </c:pt>
                 <c:pt idx="33">
-                  <c:v>121</c:v>
+                  <c:v>117</c:v>
                 </c:pt>
                 <c:pt idx="34">
                   <c:v>70</c:v>
+                </c:pt>
+                <c:pt idx="35">
+                  <c:v>113</c:v>
+                </c:pt>
+                <c:pt idx="36">
+                  <c:v>166</c:v>
+                </c:pt>
+                <c:pt idx="37">
+                  <c:v>179</c:v>
+                </c:pt>
+                <c:pt idx="38">
+                  <c:v>171</c:v>
                 </c:pt>
               </c:numCache>
             </c:numRef>
@@ -3968,7 +4094,7 @@
         <c:axId val="2094734552"/>
         <c:scaling>
           <c:orientation val="minMax"/>
-          <c:max val="150"/>
+          <c:max val="200"/>
           <c:min val="-100"/>
         </c:scaling>
         <c:delete val="0"/>
@@ -4839,7 +4965,7 @@
               <c:strCache>
                 <c:ptCount val="1"/>
                 <c:pt idx="0">
-                  <c:v>검은사막모바일</c:v>
+                  <c:v>검은사막모바일(200위 클램프)</c:v>
                 </c:pt>
               </c:strCache>
             </c:strRef>
@@ -4954,8 +5080,17 @@
               <c:numCache>
                 <c:formatCode>General</c:formatCode>
                 <c:ptCount val="39"/>
+                <c:pt idx="0">
+                  <c:v>114</c:v>
+                </c:pt>
+                <c:pt idx="1">
+                  <c:v>112</c:v>
+                </c:pt>
+                <c:pt idx="2">
+                  <c:v>116</c:v>
+                </c:pt>
                 <c:pt idx="3">
-                  <c:v>197</c:v>
+                  <c:v>128</c:v>
                 </c:pt>
                 <c:pt idx="4">
                   <c:v>155</c:v>
@@ -4963,11 +5098,104 @@
                 <c:pt idx="5">
                   <c:v>153</c:v>
                 </c:pt>
+                <c:pt idx="6">
+                  <c:v>142</c:v>
+                </c:pt>
+                <c:pt idx="7">
+                  <c:v>131</c:v>
+                </c:pt>
+                <c:pt idx="8">
+                  <c:v>126</c:v>
+                </c:pt>
+                <c:pt idx="9">
+                  <c:v>117</c:v>
+                </c:pt>
+                <c:pt idx="10">
+                  <c:v>116</c:v>
+                </c:pt>
+                <c:pt idx="11">
+                  <c:v>114</c:v>
+                </c:pt>
+                <c:pt idx="12">
+                  <c:v>115</c:v>
+                </c:pt>
+                <c:pt idx="13">
+                  <c:v>117</c:v>
+                </c:pt>
+                <c:pt idx="14">
+                  <c:v>115</c:v>
+                </c:pt>
                 <c:pt idx="15">
                   <c:v>73</c:v>
                 </c:pt>
                 <c:pt idx="16">
                   <c:v>75</c:v>
+                </c:pt>
+                <c:pt idx="17">
+                  <c:v>111</c:v>
+                </c:pt>
+                <c:pt idx="18">
+                  <c:v>110</c:v>
+                </c:pt>
+                <c:pt idx="19">
+                  <c:v>108</c:v>
+                </c:pt>
+                <c:pt idx="20">
+                  <c:v>104</c:v>
+                </c:pt>
+                <c:pt idx="21">
+                  <c:v>107</c:v>
+                </c:pt>
+                <c:pt idx="22">
+                  <c:v>109</c:v>
+                </c:pt>
+                <c:pt idx="23">
+                  <c:v>105</c:v>
+                </c:pt>
+                <c:pt idx="24">
+                  <c:v>105</c:v>
+                </c:pt>
+                <c:pt idx="25">
+                  <c:v>114</c:v>
+                </c:pt>
+                <c:pt idx="26">
+                  <c:v>108</c:v>
+                </c:pt>
+                <c:pt idx="27">
+                  <c:v>103</c:v>
+                </c:pt>
+                <c:pt idx="28">
+                  <c:v>106</c:v>
+                </c:pt>
+                <c:pt idx="29">
+                  <c:v>104</c:v>
+                </c:pt>
+                <c:pt idx="30">
+                  <c:v>113</c:v>
+                </c:pt>
+                <c:pt idx="31">
+                  <c:v>112</c:v>
+                </c:pt>
+                <c:pt idx="32">
+                  <c:v>113</c:v>
+                </c:pt>
+                <c:pt idx="33">
+                  <c:v>116</c:v>
+                </c:pt>
+                <c:pt idx="34">
+                  <c:v>123</c:v>
+                </c:pt>
+                <c:pt idx="35">
+                  <c:v>131</c:v>
+                </c:pt>
+                <c:pt idx="36">
+                  <c:v>167</c:v>
+                </c:pt>
+                <c:pt idx="37">
+                  <c:v>167</c:v>
+                </c:pt>
+                <c:pt idx="38">
+                  <c:v>159</c:v>
                 </c:pt>
               </c:numCache>
             </c:numRef>
@@ -10363,7 +10591,7 @@
                 <a:ea typeface="Calibri" pitchFamily="34" charset="-122"/>
                 <a:cs typeface="Calibri" pitchFamily="34" charset="-120"/>
               </a:rPr>
-              <a:t>출처: mobileindex.com  ·  숫자가 낮을수록 상위 순위. 검은사막M은 7/20 이후 트래킹 이탈</a:t>
+              <a:t>출처: mobileindex.com · 숫자가 낮을수록 상위 순위 · 검은사막M은 200위(차트 상한)로 클램프 표시 — 7/20 이후는 미집계 구간(실제 순위는 200보다 낮을 수 있음)</a:t>
             </a:r>
             <a:endParaRPr lang="en-US" sz="900" dirty="0"/>
           </a:p>
@@ -10628,7 +10856,7 @@
                 <a:ea typeface="Calibri" pitchFamily="34" charset="-122"/>
                 <a:cs typeface="Calibri" pitchFamily="34" charset="-120"/>
               </a:rPr>
-              <a:t>출처: mobileindex.com  ·  숫자가 낮을수록 상위 순위. 검은사막M은 2026.3월 이후 대부분 미집계</a:t>
+              <a:t>출처: mobileindex.com · 숫자가 낮을수록 상위 순위 · 검은사막M은 200위(차트 상한)로 클램프 표시 — 실측치 자체가 159~269위로 매우 낮아 대부분 상한에 걸림</a:t>
             </a:r>
             <a:endParaRPr lang="en-US" sz="900" dirty="0"/>
           </a:p>
@@ -10893,7 +11121,7 @@
                 <a:ea typeface="Calibri" pitchFamily="34" charset="-122"/>
                 <a:cs typeface="Calibri" pitchFamily="34" charset="-120"/>
               </a:rPr>
-              <a:t>산출: (경쟁작 순위 − 메이플스토리M 순위). 값이 (+)면 메이플M이 앞섬(순위 낮음/상위), (−)면 메이플M이 뒤처짐. 출처: mobileindex.com</a:t>
+              <a:t>산출: (경쟁작 순위 − 메이플스토리M 순위) · 검은사막M은 200위 클램프 적용 후 계산 · 값이 (+)면 메이플M이 앞섬, (−)면 뒤처짐. 출처: mobileindex.com</a:t>
             </a:r>
             <a:endParaRPr lang="en-US" sz="900" dirty="0"/>
           </a:p>
@@ -11360,7 +11588,7 @@
                 <a:ea typeface="Calibri" pitchFamily="34" charset="-122"/>
                 <a:cs typeface="Calibri" pitchFamily="34" charset="-120"/>
               </a:rPr>
-              <a:t>평균 84.5계단</a:t>
+              <a:t>평균 90.7계단</a:t>
             </a:r>
             <a:endParaRPr lang="en-US" sz="1000" dirty="0"/>
           </a:p>
@@ -11374,24 +11602,27 @@
         </p:nvSpPr>
         <p:spPr>
           <a:xfrm>
-            <a:off x="8641080" y="5989320"/>
-            <a:ext cx="2743200" cy="228600"/>
-          </a:xfrm>
-          <a:prstGeom prst="rect">
-            <a:avLst/>
-          </a:prstGeom>
-          <a:noFill/>
-          <a:ln/>
-        </p:spPr>
-        <p:txBody>
-          <a:bodyPr wrap="square" lIns="0" tIns="0" rIns="0" bIns="0" rtlCol="0" anchor="ctr"/>
-          <a:lstStyle/>
-          <a:p>
-            <a:pPr indent="0" marL="0">
-              <a:buNone/>
-            </a:pPr>
-            <a:r>
-              <a:rPr lang="en-US" sz="850" i="1" dirty="0">
+            <a:off x="8641080" y="5943600"/>
+            <a:ext cx="2743200" cy="365760"/>
+          </a:xfrm>
+          <a:prstGeom prst="rect">
+            <a:avLst/>
+          </a:prstGeom>
+          <a:noFill/>
+          <a:ln/>
+        </p:spPr>
+        <p:txBody>
+          <a:bodyPr wrap="square" lIns="0" tIns="0" rIns="0" bIns="0" rtlCol="0" anchor="ctr"/>
+          <a:lstStyle/>
+          <a:p>
+            <a:pPr indent="0" marL="0">
+              <a:lnSpc>
+                <a:spcPct val="115000"/>
+              </a:lnSpc>
+              <a:buNone/>
+            </a:pPr>
+            <a:r>
+              <a:rPr lang="en-US" sz="830" i="1" dirty="0">
                 <a:solidFill>
                   <a:srgbClr val="8B8FA3"/>
                 </a:solidFill>
@@ -11399,9 +11630,9 @@
                 <a:ea typeface="Calibri" pitchFamily="34" charset="-122"/>
                 <a:cs typeface="Calibri" pitchFamily="34" charset="-120"/>
               </a:rPr>
-              <a:t>※ 검은사막M은 데이터가 있는 35주 기준</a:t>
-            </a:r>
-            <a:endParaRPr lang="en-US" sz="850" dirty="0"/>
+              <a:t>※ 검은사막M: 200위 이상/미집계 주는 200으로 클램프 후 산출(39주 전체)</a:t>
+            </a:r>
+            <a:endParaRPr lang="en-US" sz="830" dirty="0"/>
           </a:p>
         </p:txBody>
       </p:sp>
@@ -11609,7 +11840,7 @@
                 <a:ea typeface="Calibri" pitchFamily="34" charset="-122"/>
                 <a:cs typeface="Calibri" pitchFamily="34" charset="-120"/>
               </a:rPr>
-              <a:t>산출: (경쟁작 순위 − 메이플스토리M 순위). 값이 (+)면 메이플M이 앞섬(순위 낮음/상위), (−)면 메이플M이 뒤처짐. 출처: mobileindex.com</a:t>
+              <a:t>산출: (경쟁작 순위 − 메이플스토리M 순위) · 검은사막M은 200위 클램프 적용 후 계산 · 값이 (+)면 메이플M이 앞섬, (−)면 뒤처짐. 출처: mobileindex.com</a:t>
             </a:r>
             <a:endParaRPr lang="en-US" sz="900" dirty="0"/>
           </a:p>
@@ -12076,7 +12307,7 @@
                 <a:ea typeface="Calibri" pitchFamily="34" charset="-122"/>
                 <a:cs typeface="Calibri" pitchFamily="34" charset="-120"/>
               </a:rPr>
-              <a:t>평균 130.6계단</a:t>
+              <a:t>평균 118.3계단</a:t>
             </a:r>
             <a:endParaRPr lang="en-US" sz="1000" dirty="0"/>
           </a:p>
@@ -12090,24 +12321,27 @@
         </p:nvSpPr>
         <p:spPr>
           <a:xfrm>
-            <a:off x="8641080" y="5989320"/>
-            <a:ext cx="2743200" cy="228600"/>
-          </a:xfrm>
-          <a:prstGeom prst="rect">
-            <a:avLst/>
-          </a:prstGeom>
-          <a:noFill/>
-          <a:ln/>
-        </p:spPr>
-        <p:txBody>
-          <a:bodyPr wrap="square" lIns="0" tIns="0" rIns="0" bIns="0" rtlCol="0" anchor="ctr"/>
-          <a:lstStyle/>
-          <a:p>
-            <a:pPr indent="0" marL="0">
-              <a:buNone/>
-            </a:pPr>
-            <a:r>
-              <a:rPr lang="en-US" sz="850" i="1" dirty="0">
+            <a:off x="8641080" y="5943600"/>
+            <a:ext cx="2743200" cy="365760"/>
+          </a:xfrm>
+          <a:prstGeom prst="rect">
+            <a:avLst/>
+          </a:prstGeom>
+          <a:noFill/>
+          <a:ln/>
+        </p:spPr>
+        <p:txBody>
+          <a:bodyPr wrap="square" lIns="0" tIns="0" rIns="0" bIns="0" rtlCol="0" anchor="ctr"/>
+          <a:lstStyle/>
+          <a:p>
+            <a:pPr indent="0" marL="0">
+              <a:lnSpc>
+                <a:spcPct val="115000"/>
+              </a:lnSpc>
+              <a:buNone/>
+            </a:pPr>
+            <a:r>
+              <a:rPr lang="en-US" sz="830" i="1" dirty="0">
                 <a:solidFill>
                   <a:srgbClr val="8B8FA3"/>
                 </a:solidFill>
@@ -12115,9 +12349,9 @@
                 <a:ea typeface="Calibri" pitchFamily="34" charset="-122"/>
                 <a:cs typeface="Calibri" pitchFamily="34" charset="-120"/>
               </a:rPr>
-              <a:t>※ 검은사막M은 데이터가 있는 5주 기준(3월 이후 대부분 미집계)</a:t>
-            </a:r>
-            <a:endParaRPr lang="en-US" sz="850" dirty="0"/>
+              <a:t>※ 검은사막M: 200위 이상/미집계 주는 200으로 클램프 후 산출(39주 전체)</a:t>
+            </a:r>
+            <a:endParaRPr lang="en-US" sz="830" dirty="0"/>
           </a:p>
         </p:txBody>
       </p:sp>

--- a/output/메이플스토리M_UA마케팅효율_분석보고서.pptx
+++ b/output/메이플스토리M_UA마케팅효율_분석보고서.pptx
@@ -13479,7 +13479,7 @@
                 <a:ea typeface="Cambria" pitchFamily="34" charset="-122"/>
                 <a:cs typeface="Cambria" pitchFamily="34" charset="-120"/>
               </a:rPr>
-              <a:t>매출순위 — 메이플M vs 경쟁작 (개별 비교)</a:t>
+              <a:t>구글 플레이스토어 순위 — 메이플M vs 경쟁작 (개별 비교)</a:t>
             </a:r>
             <a:endParaRPr lang="en-US" sz="2800" dirty="0"/>
           </a:p>
@@ -13579,7 +13579,7 @@
                 <a:ea typeface="Calibri" pitchFamily="34" charset="-122"/>
                 <a:cs typeface="Calibri" pitchFamily="34" charset="-120"/>
               </a:rPr>
-              <a:t>출처: mobileindex.com · 숫자가 낮을수록 상위 순위 · 검은사막M은 200위(차트 상한)로 클램프 — 7/20 이후 미집계(실제 순위는 200보다 낮을 수 있음)</a:t>
+              <a:t>출처: mobileindex.com(구글 플레이스토어 순위) · 숫자가 낮을수록 상위 순위 · 검은사막M은 200위(차트 상한)로 클램프 — 7/20 이후 미집계(실제 순위는 200보다 낮을 수 있음)</a:t>
             </a:r>
             <a:endParaRPr lang="en-US" sz="900" dirty="0"/>
           </a:p>
@@ -15015,7 +15015,7 @@
                 <a:ea typeface="Cambria" pitchFamily="34" charset="-122"/>
                 <a:cs typeface="Cambria" pitchFamily="34" charset="-120"/>
               </a:rPr>
-              <a:t>메이플M 기준 매출순위 격차 (개별 비교)</a:t>
+              <a:t>메이플M 기준 구글 플레이스토어 순위 격차 (개별 비교)</a:t>
             </a:r>
             <a:endParaRPr lang="en-US" sz="2800" dirty="0"/>
           </a:p>
@@ -21064,7 +21064,7 @@
                 <a:ea typeface="Calibri" pitchFamily="34" charset="-122"/>
                 <a:cs typeface="Calibri" pitchFamily="34" charset="-120"/>
               </a:rPr>
-              <a:t>7/31 RE:BOOST 이후 매출순위 87→21위 급등, 그러나 후속 업데이트 부재로 8월 재하락 조짐.</a:t>
+              <a:t>7/31 RE:BOOST 이후 구글 플레이스토어 순위 87→21위 급등, 그러나 후속 업데이트 부재로 8월 재하락 조짐.</a:t>
             </a:r>
             <a:endParaRPr lang="en-US" sz="1080" dirty="0"/>
           </a:p>
@@ -22103,7 +22103,7 @@
                 <a:ea typeface="Calibri" pitchFamily="34" charset="-122"/>
                 <a:cs typeface="Calibri" pitchFamily="34" charset="-120"/>
               </a:rPr>
-              <a:t>매출순위 (7/20 → 8/3)</a:t>
+              <a:t>구글 플레이스토어 순위 (7/20 → 8/3)</a:t>
             </a:r>
             <a:endParaRPr lang="en-US" sz="1100" dirty="0"/>
           </a:p>
@@ -24135,7 +24135,7 @@
                 <a:ea typeface="Calibri" pitchFamily="34" charset="-122"/>
                 <a:cs typeface="Calibri" pitchFamily="34" charset="-120"/>
               </a:rPr>
-              <a:t>이용자순위 3월·매출순위 7월 이후 자사 트래킹 데이터에서도 이탈 확인</a:t>
+              <a:t>이용자순위 3월·구글 플레이스토어 순위 7월 이후 자사 트래킹 데이터에서도 이탈 확인</a:t>
             </a:r>
             <a:endParaRPr lang="en-US" sz="1040" dirty="0"/>
           </a:p>
@@ -26401,8 +26401,8 @@
         </p:nvSpPr>
         <p:spPr>
           <a:xfrm>
-            <a:off x="822960" y="2377440"/>
-            <a:ext cx="8183880" cy="0"/>
+            <a:off x="1847088" y="1920240"/>
+            <a:ext cx="8476488" cy="0"/>
           </a:xfrm>
           <a:prstGeom prst="line">
             <a:avLst/>
@@ -26410,7 +26410,7 @@
           <a:noFill/>
           <a:ln w="25400">
             <a:solidFill>
-              <a:srgbClr val="D8D8E0"/>
+              <a:srgbClr val="E1E2E8"/>
             </a:solidFill>
             <a:prstDash val="solid"/>
           </a:ln>
@@ -26418,14 +26418,53 @@
       </p:sp>
       <p:sp>
         <p:nvSpPr>
-          <p:cNvPr id="6" name="Shape 4"/>
-          <p:cNvSpPr/>
-          <p:nvPr/>
-        </p:nvSpPr>
-        <p:spPr>
-          <a:xfrm>
-            <a:off x="722376" y="2276856"/>
-            <a:ext cx="201168" cy="201168"/>
+          <p:cNvPr id="6" name="Text 4"/>
+          <p:cNvSpPr/>
+          <p:nvPr/>
+        </p:nvSpPr>
+        <p:spPr>
+          <a:xfrm>
+            <a:off x="932688" y="1554480"/>
+            <a:ext cx="1828800" cy="274320"/>
+          </a:xfrm>
+          <a:prstGeom prst="rect">
+            <a:avLst/>
+          </a:prstGeom>
+          <a:noFill/>
+          <a:ln/>
+        </p:spPr>
+        <p:txBody>
+          <a:bodyPr wrap="square" lIns="0" tIns="0" rIns="0" bIns="0" rtlCol="0" anchor="ctr"/>
+          <a:lstStyle/>
+          <a:p>
+            <a:pPr algn="ctr" indent="0" marL="0">
+              <a:buNone/>
+            </a:pPr>
+            <a:r>
+              <a:rPr lang="en-US" sz="1350" b="1" dirty="0">
+                <a:solidFill>
+                  <a:srgbClr val="F0692B"/>
+                </a:solidFill>
+                <a:latin typeface="Cambria" pitchFamily="34" charset="0"/>
+                <a:ea typeface="Cambria" pitchFamily="34" charset="-122"/>
+                <a:cs typeface="Cambria" pitchFamily="34" charset="-120"/>
+              </a:rPr>
+              <a:t>26 Q4</a:t>
+            </a:r>
+            <a:endParaRPr lang="en-US" sz="1350" dirty="0"/>
+          </a:p>
+        </p:txBody>
+      </p:sp>
+      <p:sp>
+        <p:nvSpPr>
+          <p:cNvPr id="7" name="Shape 5"/>
+          <p:cNvSpPr/>
+          <p:nvPr/>
+        </p:nvSpPr>
+        <p:spPr>
+          <a:xfrm>
+            <a:off x="1737360" y="1810512"/>
+            <a:ext cx="219456" cy="219456"/>
           </a:xfrm>
           <a:prstGeom prst="ellipse">
             <a:avLst/>
@@ -26443,57 +26482,41 @@
       </p:sp>
       <p:sp>
         <p:nvSpPr>
-          <p:cNvPr id="7" name="Text 5"/>
-          <p:cNvSpPr/>
-          <p:nvPr/>
-        </p:nvSpPr>
-        <p:spPr>
-          <a:xfrm>
-            <a:off x="-91440" y="1691640"/>
-            <a:ext cx="2194560" cy="320040"/>
-          </a:xfrm>
-          <a:prstGeom prst="rect">
-            <a:avLst/>
-          </a:prstGeom>
-          <a:noFill/>
-          <a:ln/>
-        </p:spPr>
-        <p:txBody>
-          <a:bodyPr wrap="square" lIns="0" tIns="0" rIns="0" bIns="0" rtlCol="0" anchor="ctr"/>
-          <a:lstStyle/>
-          <a:p>
-            <a:pPr indent="0" marL="0">
-              <a:buNone/>
-            </a:pPr>
-            <a:r>
-              <a:rPr lang="en-US" sz="1400" b="1" dirty="0">
-                <a:solidFill>
-                  <a:srgbClr val="F0692B"/>
-                </a:solidFill>
-                <a:latin typeface="Cambria" pitchFamily="34" charset="0"/>
-                <a:ea typeface="Cambria" pitchFamily="34" charset="-122"/>
-                <a:cs typeface="Cambria" pitchFamily="34" charset="-120"/>
-              </a:rPr>
-              <a:t>26 Q4</a:t>
-            </a:r>
-            <a:endParaRPr lang="en-US" sz="1400" dirty="0"/>
-          </a:p>
-        </p:txBody>
-      </p:sp>
-      <p:sp>
-        <p:nvSpPr>
           <p:cNvPr id="8" name="Shape 6"/>
           <p:cNvSpPr/>
           <p:nvPr/>
         </p:nvSpPr>
         <p:spPr>
           <a:xfrm>
-            <a:off x="-320040" y="2651760"/>
-            <a:ext cx="2468880" cy="1874520"/>
+            <a:off x="1847088" y="2029968"/>
+            <a:ext cx="0" cy="301752"/>
+          </a:xfrm>
+          <a:prstGeom prst="line">
+            <a:avLst/>
+          </a:prstGeom>
+          <a:noFill/>
+          <a:ln w="19050">
+            <a:solidFill>
+              <a:srgbClr val="E1E2E8"/>
+            </a:solidFill>
+            <a:prstDash val="dash"/>
+          </a:ln>
+        </p:spPr>
+      </p:sp>
+      <p:sp>
+        <p:nvSpPr>
+          <p:cNvPr id="9" name="Shape 7"/>
+          <p:cNvSpPr/>
+          <p:nvPr/>
+        </p:nvSpPr>
+        <p:spPr>
+          <a:xfrm>
+            <a:off x="548640" y="2331720"/>
+            <a:ext cx="2596896" cy="2743200"/>
           </a:xfrm>
           <a:prstGeom prst="roundRect">
             <a:avLst>
-              <a:gd name="adj" fmla="val 3415"/>
+              <a:gd name="adj" fmla="val 2817"/>
             </a:avLst>
           </a:prstGeom>
           <a:solidFill>
@@ -26509,14 +26532,73 @@
       </p:sp>
       <p:sp>
         <p:nvSpPr>
-          <p:cNvPr id="9" name="Text 7"/>
-          <p:cNvSpPr/>
-          <p:nvPr/>
-        </p:nvSpPr>
-        <p:spPr>
-          <a:xfrm>
-            <a:off x="-137160" y="2816352"/>
-            <a:ext cx="2103120" cy="594360"/>
+          <p:cNvPr id="10" name="Shape 8"/>
+          <p:cNvSpPr/>
+          <p:nvPr/>
+        </p:nvSpPr>
+        <p:spPr>
+          <a:xfrm>
+            <a:off x="768096" y="2532888"/>
+            <a:ext cx="457200" cy="457200"/>
+          </a:xfrm>
+          <a:prstGeom prst="ellipse">
+            <a:avLst/>
+          </a:prstGeom>
+          <a:solidFill>
+            <a:srgbClr val="F0692B"/>
+          </a:solidFill>
+          <a:ln/>
+        </p:spPr>
+      </p:sp>
+      <p:sp>
+        <p:nvSpPr>
+          <p:cNvPr id="11" name="Text 9"/>
+          <p:cNvSpPr/>
+          <p:nvPr/>
+        </p:nvSpPr>
+        <p:spPr>
+          <a:xfrm>
+            <a:off x="768096" y="2532888"/>
+            <a:ext cx="457200" cy="457200"/>
+          </a:xfrm>
+          <a:prstGeom prst="rect">
+            <a:avLst/>
+          </a:prstGeom>
+          <a:noFill/>
+          <a:ln/>
+        </p:spPr>
+        <p:txBody>
+          <a:bodyPr wrap="square" lIns="0" tIns="0" rIns="0" bIns="0" rtlCol="0" anchor="ctr"/>
+          <a:lstStyle/>
+          <a:p>
+            <a:pPr algn="ctr" indent="0" marL="0">
+              <a:buNone/>
+            </a:pPr>
+            <a:r>
+              <a:rPr lang="en-US" sz="1800" b="1" dirty="0">
+                <a:solidFill>
+                  <a:srgbClr val="FFFFFF"/>
+                </a:solidFill>
+                <a:latin typeface="Cambria" pitchFamily="34" charset="0"/>
+                <a:ea typeface="Cambria" pitchFamily="34" charset="-122"/>
+                <a:cs typeface="Cambria" pitchFamily="34" charset="-120"/>
+              </a:rPr>
+              <a:t>1</a:t>
+            </a:r>
+            <a:endParaRPr lang="en-US" sz="1800" dirty="0"/>
+          </a:p>
+        </p:txBody>
+      </p:sp>
+      <p:sp>
+        <p:nvSpPr>
+          <p:cNvPr id="12" name="Text 10"/>
+          <p:cNvSpPr/>
+          <p:nvPr/>
+        </p:nvSpPr>
+        <p:spPr>
+          <a:xfrm>
+            <a:off x="768096" y="3099816"/>
+            <a:ext cx="2157984" cy="658368"/>
           </a:xfrm>
           <a:prstGeom prst="rect">
             <a:avLst/>
@@ -26530,35 +26612,58 @@
           <a:p>
             <a:pPr indent="0" marL="0">
               <a:lnSpc>
-                <a:spcPct val="115000"/>
+                <a:spcPct val="112000"/>
               </a:lnSpc>
               <a:buNone/>
             </a:pPr>
             <a:r>
-              <a:rPr lang="en-US" sz="1250" b="1" dirty="0">
+              <a:rPr lang="en-US" sz="1400" b="1" dirty="0">
                 <a:solidFill>
                   <a:srgbClr val="1C1E29"/>
                 </a:solidFill>
-                <a:latin typeface="Calibri" pitchFamily="34" charset="0"/>
-                <a:ea typeface="Calibri" pitchFamily="34" charset="-122"/>
-                <a:cs typeface="Calibri" pitchFamily="34" charset="-120"/>
+                <a:latin typeface="Cambria" pitchFamily="34" charset="0"/>
+                <a:ea typeface="Cambria" pitchFamily="34" charset="-122"/>
+                <a:cs typeface="Cambria" pitchFamily="34" charset="-120"/>
               </a:rPr>
               <a:t>공백 방지 체계 구축</a:t>
             </a:r>
-            <a:endParaRPr lang="en-US" sz="1250" dirty="0"/>
-          </a:p>
-        </p:txBody>
-      </p:sp>
-      <p:sp>
-        <p:nvSpPr>
-          <p:cNvPr id="10" name="Text 8"/>
-          <p:cNvSpPr/>
-          <p:nvPr/>
-        </p:nvSpPr>
-        <p:spPr>
-          <a:xfrm>
-            <a:off x="-137160" y="3429000"/>
-            <a:ext cx="2103120" cy="1005840"/>
+            <a:endParaRPr lang="en-US" sz="1400" dirty="0"/>
+          </a:p>
+        </p:txBody>
+      </p:sp>
+      <p:sp>
+        <p:nvSpPr>
+          <p:cNvPr id="13" name="Shape 11"/>
+          <p:cNvSpPr/>
+          <p:nvPr/>
+        </p:nvSpPr>
+        <p:spPr>
+          <a:xfrm>
+            <a:off x="768096" y="3813048"/>
+            <a:ext cx="2157984" cy="0"/>
+          </a:xfrm>
+          <a:prstGeom prst="line">
+            <a:avLst/>
+          </a:prstGeom>
+          <a:noFill/>
+          <a:ln w="12700">
+            <a:solidFill>
+              <a:srgbClr val="E7E7EC"/>
+            </a:solidFill>
+            <a:prstDash val="solid"/>
+          </a:ln>
+        </p:spPr>
+      </p:sp>
+      <p:sp>
+        <p:nvSpPr>
+          <p:cNvPr id="14" name="Text 12"/>
+          <p:cNvSpPr/>
+          <p:nvPr/>
+        </p:nvSpPr>
+        <p:spPr>
+          <a:xfrm>
+            <a:off x="768096" y="3941064"/>
+            <a:ext cx="2157984" cy="950976"/>
           </a:xfrm>
           <a:prstGeom prst="rect">
             <a:avLst/>
@@ -26572,12 +26677,12 @@
           <a:p>
             <a:pPr indent="0" marL="0">
               <a:lnSpc>
-                <a:spcPct val="120000"/>
+                <a:spcPct val="128000"/>
               </a:lnSpc>
               <a:buNone/>
             </a:pPr>
             <a:r>
-              <a:rPr lang="en-US" sz="980" dirty="0">
+              <a:rPr lang="en-US" sz="1030" dirty="0">
                 <a:solidFill>
                   <a:srgbClr val="6B6F80"/>
                 </a:solidFill>
@@ -26587,20 +26692,59 @@
               </a:rPr>
               <a:t>분기별 콘텐츠 캘린더 확정 및 쇼케이스로 Q1 로드맵 선공개</a:t>
             </a:r>
-            <a:endParaRPr lang="en-US" sz="980" dirty="0"/>
-          </a:p>
-        </p:txBody>
-      </p:sp>
-      <p:sp>
-        <p:nvSpPr>
-          <p:cNvPr id="11" name="Shape 9"/>
-          <p:cNvSpPr/>
-          <p:nvPr/>
-        </p:nvSpPr>
-        <p:spPr>
-          <a:xfrm>
-            <a:off x="3328416" y="2276856"/>
-            <a:ext cx="201168" cy="201168"/>
+            <a:endParaRPr lang="en-US" sz="1030" dirty="0"/>
+          </a:p>
+        </p:txBody>
+      </p:sp>
+      <p:sp>
+        <p:nvSpPr>
+          <p:cNvPr id="15" name="Text 13"/>
+          <p:cNvSpPr/>
+          <p:nvPr/>
+        </p:nvSpPr>
+        <p:spPr>
+          <a:xfrm>
+            <a:off x="3758184" y="1554480"/>
+            <a:ext cx="1828800" cy="274320"/>
+          </a:xfrm>
+          <a:prstGeom prst="rect">
+            <a:avLst/>
+          </a:prstGeom>
+          <a:noFill/>
+          <a:ln/>
+        </p:spPr>
+        <p:txBody>
+          <a:bodyPr wrap="square" lIns="0" tIns="0" rIns="0" bIns="0" rtlCol="0" anchor="ctr"/>
+          <a:lstStyle/>
+          <a:p>
+            <a:pPr algn="ctr" indent="0" marL="0">
+              <a:buNone/>
+            </a:pPr>
+            <a:r>
+              <a:rPr lang="en-US" sz="1350" b="1" dirty="0">
+                <a:solidFill>
+                  <a:srgbClr val="6B4FA0"/>
+                </a:solidFill>
+                <a:latin typeface="Cambria" pitchFamily="34" charset="0"/>
+                <a:ea typeface="Cambria" pitchFamily="34" charset="-122"/>
+                <a:cs typeface="Cambria" pitchFamily="34" charset="-120"/>
+              </a:rPr>
+              <a:t>27 Q1</a:t>
+            </a:r>
+            <a:endParaRPr lang="en-US" sz="1350" dirty="0"/>
+          </a:p>
+        </p:txBody>
+      </p:sp>
+      <p:sp>
+        <p:nvSpPr>
+          <p:cNvPr id="16" name="Shape 14"/>
+          <p:cNvSpPr/>
+          <p:nvPr/>
+        </p:nvSpPr>
+        <p:spPr>
+          <a:xfrm>
+            <a:off x="4562856" y="1810512"/>
+            <a:ext cx="219456" cy="219456"/>
           </a:xfrm>
           <a:prstGeom prst="ellipse">
             <a:avLst/>
@@ -26618,57 +26762,41 @@
       </p:sp>
       <p:sp>
         <p:nvSpPr>
-          <p:cNvPr id="12" name="Text 10"/>
-          <p:cNvSpPr/>
-          <p:nvPr/>
-        </p:nvSpPr>
-        <p:spPr>
-          <a:xfrm>
-            <a:off x="2514600" y="1691640"/>
-            <a:ext cx="2194560" cy="320040"/>
-          </a:xfrm>
-          <a:prstGeom prst="rect">
-            <a:avLst/>
-          </a:prstGeom>
-          <a:noFill/>
-          <a:ln/>
-        </p:spPr>
-        <p:txBody>
-          <a:bodyPr wrap="square" lIns="0" tIns="0" rIns="0" bIns="0" rtlCol="0" anchor="ctr"/>
-          <a:lstStyle/>
-          <a:p>
-            <a:pPr indent="0" marL="0">
-              <a:buNone/>
-            </a:pPr>
-            <a:r>
-              <a:rPr lang="en-US" sz="1400" b="1" dirty="0">
-                <a:solidFill>
-                  <a:srgbClr val="6B4FA0"/>
-                </a:solidFill>
-                <a:latin typeface="Cambria" pitchFamily="34" charset="0"/>
-                <a:ea typeface="Cambria" pitchFamily="34" charset="-122"/>
-                <a:cs typeface="Cambria" pitchFamily="34" charset="-120"/>
-              </a:rPr>
-              <a:t>27 Q1</a:t>
-            </a:r>
-            <a:endParaRPr lang="en-US" sz="1400" dirty="0"/>
-          </a:p>
-        </p:txBody>
-      </p:sp>
-      <p:sp>
-        <p:nvSpPr>
-          <p:cNvPr id="13" name="Shape 11"/>
-          <p:cNvSpPr/>
-          <p:nvPr/>
-        </p:nvSpPr>
-        <p:spPr>
-          <a:xfrm>
-            <a:off x="2286000" y="2651760"/>
-            <a:ext cx="2468880" cy="1874520"/>
+          <p:cNvPr id="17" name="Shape 15"/>
+          <p:cNvSpPr/>
+          <p:nvPr/>
+        </p:nvSpPr>
+        <p:spPr>
+          <a:xfrm>
+            <a:off x="4672584" y="2029968"/>
+            <a:ext cx="0" cy="301752"/>
+          </a:xfrm>
+          <a:prstGeom prst="line">
+            <a:avLst/>
+          </a:prstGeom>
+          <a:noFill/>
+          <a:ln w="19050">
+            <a:solidFill>
+              <a:srgbClr val="E1E2E8"/>
+            </a:solidFill>
+            <a:prstDash val="dash"/>
+          </a:ln>
+        </p:spPr>
+      </p:sp>
+      <p:sp>
+        <p:nvSpPr>
+          <p:cNvPr id="18" name="Shape 16"/>
+          <p:cNvSpPr/>
+          <p:nvPr/>
+        </p:nvSpPr>
+        <p:spPr>
+          <a:xfrm>
+            <a:off x="3374136" y="2331720"/>
+            <a:ext cx="2596896" cy="2743200"/>
           </a:xfrm>
           <a:prstGeom prst="roundRect">
             <a:avLst>
-              <a:gd name="adj" fmla="val 3415"/>
+              <a:gd name="adj" fmla="val 2817"/>
             </a:avLst>
           </a:prstGeom>
           <a:solidFill>
@@ -26684,14 +26812,73 @@
       </p:sp>
       <p:sp>
         <p:nvSpPr>
-          <p:cNvPr id="14" name="Text 12"/>
-          <p:cNvSpPr/>
-          <p:nvPr/>
-        </p:nvSpPr>
-        <p:spPr>
-          <a:xfrm>
-            <a:off x="2468880" y="2816352"/>
-            <a:ext cx="2103120" cy="594360"/>
+          <p:cNvPr id="19" name="Shape 17"/>
+          <p:cNvSpPr/>
+          <p:nvPr/>
+        </p:nvSpPr>
+        <p:spPr>
+          <a:xfrm>
+            <a:off x="3593592" y="2532888"/>
+            <a:ext cx="457200" cy="457200"/>
+          </a:xfrm>
+          <a:prstGeom prst="ellipse">
+            <a:avLst/>
+          </a:prstGeom>
+          <a:solidFill>
+            <a:srgbClr val="6B4FA0"/>
+          </a:solidFill>
+          <a:ln/>
+        </p:spPr>
+      </p:sp>
+      <p:sp>
+        <p:nvSpPr>
+          <p:cNvPr id="20" name="Text 18"/>
+          <p:cNvSpPr/>
+          <p:nvPr/>
+        </p:nvSpPr>
+        <p:spPr>
+          <a:xfrm>
+            <a:off x="3593592" y="2532888"/>
+            <a:ext cx="457200" cy="457200"/>
+          </a:xfrm>
+          <a:prstGeom prst="rect">
+            <a:avLst/>
+          </a:prstGeom>
+          <a:noFill/>
+          <a:ln/>
+        </p:spPr>
+        <p:txBody>
+          <a:bodyPr wrap="square" lIns="0" tIns="0" rIns="0" bIns="0" rtlCol="0" anchor="ctr"/>
+          <a:lstStyle/>
+          <a:p>
+            <a:pPr algn="ctr" indent="0" marL="0">
+              <a:buNone/>
+            </a:pPr>
+            <a:r>
+              <a:rPr lang="en-US" sz="1800" b="1" dirty="0">
+                <a:solidFill>
+                  <a:srgbClr val="FFFFFF"/>
+                </a:solidFill>
+                <a:latin typeface="Cambria" pitchFamily="34" charset="0"/>
+                <a:ea typeface="Cambria" pitchFamily="34" charset="-122"/>
+                <a:cs typeface="Cambria" pitchFamily="34" charset="-120"/>
+              </a:rPr>
+              <a:t>2</a:t>
+            </a:r>
+            <a:endParaRPr lang="en-US" sz="1800" dirty="0"/>
+          </a:p>
+        </p:txBody>
+      </p:sp>
+      <p:sp>
+        <p:nvSpPr>
+          <p:cNvPr id="21" name="Text 19"/>
+          <p:cNvSpPr/>
+          <p:nvPr/>
+        </p:nvSpPr>
+        <p:spPr>
+          <a:xfrm>
+            <a:off x="3593592" y="3099816"/>
+            <a:ext cx="2157984" cy="658368"/>
           </a:xfrm>
           <a:prstGeom prst="rect">
             <a:avLst/>
@@ -26705,35 +26892,58 @@
           <a:p>
             <a:pPr indent="0" marL="0">
               <a:lnSpc>
-                <a:spcPct val="115000"/>
+                <a:spcPct val="112000"/>
               </a:lnSpc>
               <a:buNone/>
             </a:pPr>
             <a:r>
-              <a:rPr lang="en-US" sz="1250" b="1" dirty="0">
+              <a:rPr lang="en-US" sz="1400" b="1" dirty="0">
                 <a:solidFill>
                   <a:srgbClr val="1C1E29"/>
                 </a:solidFill>
-                <a:latin typeface="Calibri" pitchFamily="34" charset="0"/>
-                <a:ea typeface="Calibri" pitchFamily="34" charset="-122"/>
-                <a:cs typeface="Calibri" pitchFamily="34" charset="-120"/>
+                <a:latin typeface="Cambria" pitchFamily="34" charset="0"/>
+                <a:ea typeface="Cambria" pitchFamily="34" charset="-122"/>
+                <a:cs typeface="Cambria" pitchFamily="34" charset="-120"/>
               </a:rPr>
               <a:t>UA 계측 체계 파일럿</a:t>
             </a:r>
-            <a:endParaRPr lang="en-US" sz="1250" dirty="0"/>
-          </a:p>
-        </p:txBody>
-      </p:sp>
-      <p:sp>
-        <p:nvSpPr>
-          <p:cNvPr id="15" name="Text 13"/>
-          <p:cNvSpPr/>
-          <p:nvPr/>
-        </p:nvSpPr>
-        <p:spPr>
-          <a:xfrm>
-            <a:off x="2468880" y="3429000"/>
-            <a:ext cx="2103120" cy="1005840"/>
+            <a:endParaRPr lang="en-US" sz="1400" dirty="0"/>
+          </a:p>
+        </p:txBody>
+      </p:sp>
+      <p:sp>
+        <p:nvSpPr>
+          <p:cNvPr id="22" name="Shape 20"/>
+          <p:cNvSpPr/>
+          <p:nvPr/>
+        </p:nvSpPr>
+        <p:spPr>
+          <a:xfrm>
+            <a:off x="3593592" y="3813048"/>
+            <a:ext cx="2157984" cy="0"/>
+          </a:xfrm>
+          <a:prstGeom prst="line">
+            <a:avLst/>
+          </a:prstGeom>
+          <a:noFill/>
+          <a:ln w="12700">
+            <a:solidFill>
+              <a:srgbClr val="E7E7EC"/>
+            </a:solidFill>
+            <a:prstDash val="solid"/>
+          </a:ln>
+        </p:spPr>
+      </p:sp>
+      <p:sp>
+        <p:nvSpPr>
+          <p:cNvPr id="23" name="Text 21"/>
+          <p:cNvSpPr/>
+          <p:nvPr/>
+        </p:nvSpPr>
+        <p:spPr>
+          <a:xfrm>
+            <a:off x="3593592" y="3941064"/>
+            <a:ext cx="2157984" cy="950976"/>
           </a:xfrm>
           <a:prstGeom prst="rect">
             <a:avLst/>
@@ -26747,12 +26957,12 @@
           <a:p>
             <a:pPr indent="0" marL="0">
               <a:lnSpc>
-                <a:spcPct val="120000"/>
+                <a:spcPct val="128000"/>
               </a:lnSpc>
               <a:buNone/>
             </a:pPr>
             <a:r>
-              <a:rPr lang="en-US" sz="980" dirty="0">
+              <a:rPr lang="en-US" sz="1030" dirty="0">
                 <a:solidFill>
                   <a:srgbClr val="6B6F80"/>
                 </a:solidFill>
@@ -26762,20 +26972,59 @@
               </a:rPr>
               <a:t>타이틀 단위 집행액·설치수 트래킹 구축, 메타 의존 비중 단계적 축소</a:t>
             </a:r>
-            <a:endParaRPr lang="en-US" sz="980" dirty="0"/>
-          </a:p>
-        </p:txBody>
-      </p:sp>
-      <p:sp>
-        <p:nvSpPr>
-          <p:cNvPr id="16" name="Shape 14"/>
-          <p:cNvSpPr/>
-          <p:nvPr/>
-        </p:nvSpPr>
-        <p:spPr>
-          <a:xfrm>
-            <a:off x="5934456" y="2276856"/>
-            <a:ext cx="201168" cy="201168"/>
+            <a:endParaRPr lang="en-US" sz="1030" dirty="0"/>
+          </a:p>
+        </p:txBody>
+      </p:sp>
+      <p:sp>
+        <p:nvSpPr>
+          <p:cNvPr id="24" name="Text 22"/>
+          <p:cNvSpPr/>
+          <p:nvPr/>
+        </p:nvSpPr>
+        <p:spPr>
+          <a:xfrm>
+            <a:off x="6583680" y="1554480"/>
+            <a:ext cx="1828800" cy="274320"/>
+          </a:xfrm>
+          <a:prstGeom prst="rect">
+            <a:avLst/>
+          </a:prstGeom>
+          <a:noFill/>
+          <a:ln/>
+        </p:spPr>
+        <p:txBody>
+          <a:bodyPr wrap="square" lIns="0" tIns="0" rIns="0" bIns="0" rtlCol="0" anchor="ctr"/>
+          <a:lstStyle/>
+          <a:p>
+            <a:pPr algn="ctr" indent="0" marL="0">
+              <a:buNone/>
+            </a:pPr>
+            <a:r>
+              <a:rPr lang="en-US" sz="1350" b="1" dirty="0">
+                <a:solidFill>
+                  <a:srgbClr val="2FA89A"/>
+                </a:solidFill>
+                <a:latin typeface="Cambria" pitchFamily="34" charset="0"/>
+                <a:ea typeface="Cambria" pitchFamily="34" charset="-122"/>
+                <a:cs typeface="Cambria" pitchFamily="34" charset="-120"/>
+              </a:rPr>
+              <a:t>27 Q1~Q2</a:t>
+            </a:r>
+            <a:endParaRPr lang="en-US" sz="1350" dirty="0"/>
+          </a:p>
+        </p:txBody>
+      </p:sp>
+      <p:sp>
+        <p:nvSpPr>
+          <p:cNvPr id="25" name="Shape 23"/>
+          <p:cNvSpPr/>
+          <p:nvPr/>
+        </p:nvSpPr>
+        <p:spPr>
+          <a:xfrm>
+            <a:off x="7388352" y="1810512"/>
+            <a:ext cx="219456" cy="219456"/>
           </a:xfrm>
           <a:prstGeom prst="ellipse">
             <a:avLst/>
@@ -26793,57 +27042,41 @@
       </p:sp>
       <p:sp>
         <p:nvSpPr>
-          <p:cNvPr id="17" name="Text 15"/>
-          <p:cNvSpPr/>
-          <p:nvPr/>
-        </p:nvSpPr>
-        <p:spPr>
-          <a:xfrm>
-            <a:off x="5120640" y="1691640"/>
-            <a:ext cx="2194560" cy="320040"/>
-          </a:xfrm>
-          <a:prstGeom prst="rect">
-            <a:avLst/>
-          </a:prstGeom>
-          <a:noFill/>
-          <a:ln/>
-        </p:spPr>
-        <p:txBody>
-          <a:bodyPr wrap="square" lIns="0" tIns="0" rIns="0" bIns="0" rtlCol="0" anchor="ctr"/>
-          <a:lstStyle/>
-          <a:p>
-            <a:pPr indent="0" marL="0">
-              <a:buNone/>
-            </a:pPr>
-            <a:r>
-              <a:rPr lang="en-US" sz="1400" b="1" dirty="0">
-                <a:solidFill>
-                  <a:srgbClr val="2FA89A"/>
-                </a:solidFill>
-                <a:latin typeface="Cambria" pitchFamily="34" charset="0"/>
-                <a:ea typeface="Cambria" pitchFamily="34" charset="-122"/>
-                <a:cs typeface="Cambria" pitchFamily="34" charset="-120"/>
-              </a:rPr>
-              <a:t>27 Q1~Q2</a:t>
-            </a:r>
-            <a:endParaRPr lang="en-US" sz="1400" dirty="0"/>
-          </a:p>
-        </p:txBody>
-      </p:sp>
-      <p:sp>
-        <p:nvSpPr>
-          <p:cNvPr id="18" name="Shape 16"/>
-          <p:cNvSpPr/>
-          <p:nvPr/>
-        </p:nvSpPr>
-        <p:spPr>
-          <a:xfrm>
-            <a:off x="4892040" y="2651760"/>
-            <a:ext cx="2468880" cy="1874520"/>
+          <p:cNvPr id="26" name="Shape 24"/>
+          <p:cNvSpPr/>
+          <p:nvPr/>
+        </p:nvSpPr>
+        <p:spPr>
+          <a:xfrm>
+            <a:off x="7498080" y="2029968"/>
+            <a:ext cx="0" cy="301752"/>
+          </a:xfrm>
+          <a:prstGeom prst="line">
+            <a:avLst/>
+          </a:prstGeom>
+          <a:noFill/>
+          <a:ln w="19050">
+            <a:solidFill>
+              <a:srgbClr val="E1E2E8"/>
+            </a:solidFill>
+            <a:prstDash val="dash"/>
+          </a:ln>
+        </p:spPr>
+      </p:sp>
+      <p:sp>
+        <p:nvSpPr>
+          <p:cNvPr id="27" name="Shape 25"/>
+          <p:cNvSpPr/>
+          <p:nvPr/>
+        </p:nvSpPr>
+        <p:spPr>
+          <a:xfrm>
+            <a:off x="6199632" y="2331720"/>
+            <a:ext cx="2596896" cy="2743200"/>
           </a:xfrm>
           <a:prstGeom prst="roundRect">
             <a:avLst>
-              <a:gd name="adj" fmla="val 3415"/>
+              <a:gd name="adj" fmla="val 2817"/>
             </a:avLst>
           </a:prstGeom>
           <a:solidFill>
@@ -26859,14 +27092,73 @@
       </p:sp>
       <p:sp>
         <p:nvSpPr>
-          <p:cNvPr id="19" name="Text 17"/>
-          <p:cNvSpPr/>
-          <p:nvPr/>
-        </p:nvSpPr>
-        <p:spPr>
-          <a:xfrm>
-            <a:off x="5074920" y="2816352"/>
-            <a:ext cx="2103120" cy="594360"/>
+          <p:cNvPr id="28" name="Shape 26"/>
+          <p:cNvSpPr/>
+          <p:nvPr/>
+        </p:nvSpPr>
+        <p:spPr>
+          <a:xfrm>
+            <a:off x="6419088" y="2532888"/>
+            <a:ext cx="457200" cy="457200"/>
+          </a:xfrm>
+          <a:prstGeom prst="ellipse">
+            <a:avLst/>
+          </a:prstGeom>
+          <a:solidFill>
+            <a:srgbClr val="2FA89A"/>
+          </a:solidFill>
+          <a:ln/>
+        </p:spPr>
+      </p:sp>
+      <p:sp>
+        <p:nvSpPr>
+          <p:cNvPr id="29" name="Text 27"/>
+          <p:cNvSpPr/>
+          <p:nvPr/>
+        </p:nvSpPr>
+        <p:spPr>
+          <a:xfrm>
+            <a:off x="6419088" y="2532888"/>
+            <a:ext cx="457200" cy="457200"/>
+          </a:xfrm>
+          <a:prstGeom prst="rect">
+            <a:avLst/>
+          </a:prstGeom>
+          <a:noFill/>
+          <a:ln/>
+        </p:spPr>
+        <p:txBody>
+          <a:bodyPr wrap="square" lIns="0" tIns="0" rIns="0" bIns="0" rtlCol="0" anchor="ctr"/>
+          <a:lstStyle/>
+          <a:p>
+            <a:pPr algn="ctr" indent="0" marL="0">
+              <a:buNone/>
+            </a:pPr>
+            <a:r>
+              <a:rPr lang="en-US" sz="1800" b="1" dirty="0">
+                <a:solidFill>
+                  <a:srgbClr val="FFFFFF"/>
+                </a:solidFill>
+                <a:latin typeface="Cambria" pitchFamily="34" charset="0"/>
+                <a:ea typeface="Cambria" pitchFamily="34" charset="-122"/>
+                <a:cs typeface="Cambria" pitchFamily="34" charset="-120"/>
+              </a:rPr>
+              <a:t>3</a:t>
+            </a:r>
+            <a:endParaRPr lang="en-US" sz="1800" dirty="0"/>
+          </a:p>
+        </p:txBody>
+      </p:sp>
+      <p:sp>
+        <p:nvSpPr>
+          <p:cNvPr id="30" name="Text 28"/>
+          <p:cNvSpPr/>
+          <p:nvPr/>
+        </p:nvSpPr>
+        <p:spPr>
+          <a:xfrm>
+            <a:off x="6419088" y="3099816"/>
+            <a:ext cx="2157984" cy="658368"/>
           </a:xfrm>
           <a:prstGeom prst="rect">
             <a:avLst/>
@@ -26880,35 +27172,58 @@
           <a:p>
             <a:pPr indent="0" marL="0">
               <a:lnSpc>
-                <a:spcPct val="115000"/>
+                <a:spcPct val="112000"/>
               </a:lnSpc>
               <a:buNone/>
             </a:pPr>
             <a:r>
-              <a:rPr lang="en-US" sz="1250" b="1" dirty="0">
+              <a:rPr lang="en-US" sz="1400" b="1" dirty="0">
                 <a:solidFill>
                   <a:srgbClr val="1C1E29"/>
                 </a:solidFill>
-                <a:latin typeface="Calibri" pitchFamily="34" charset="0"/>
-                <a:ea typeface="Calibri" pitchFamily="34" charset="-122"/>
-                <a:cs typeface="Calibri" pitchFamily="34" charset="-120"/>
+                <a:latin typeface="Cambria" pitchFamily="34" charset="0"/>
+                <a:ea typeface="Cambria" pitchFamily="34" charset="-122"/>
+                <a:cs typeface="Cambria" pitchFamily="34" charset="-120"/>
               </a:rPr>
               <a:t>리브랜딩 캠페인 런칭</a:t>
             </a:r>
-            <a:endParaRPr lang="en-US" sz="1250" dirty="0"/>
-          </a:p>
-        </p:txBody>
-      </p:sp>
-      <p:sp>
-        <p:nvSpPr>
-          <p:cNvPr id="20" name="Text 18"/>
-          <p:cNvSpPr/>
-          <p:nvPr/>
-        </p:nvSpPr>
-        <p:spPr>
-          <a:xfrm>
-            <a:off x="5074920" y="3429000"/>
-            <a:ext cx="2103120" cy="1005840"/>
+            <a:endParaRPr lang="en-US" sz="1400" dirty="0"/>
+          </a:p>
+        </p:txBody>
+      </p:sp>
+      <p:sp>
+        <p:nvSpPr>
+          <p:cNvPr id="31" name="Shape 29"/>
+          <p:cNvSpPr/>
+          <p:nvPr/>
+        </p:nvSpPr>
+        <p:spPr>
+          <a:xfrm>
+            <a:off x="6419088" y="3813048"/>
+            <a:ext cx="2157984" cy="0"/>
+          </a:xfrm>
+          <a:prstGeom prst="line">
+            <a:avLst/>
+          </a:prstGeom>
+          <a:noFill/>
+          <a:ln w="12700">
+            <a:solidFill>
+              <a:srgbClr val="E7E7EC"/>
+            </a:solidFill>
+            <a:prstDash val="solid"/>
+          </a:ln>
+        </p:spPr>
+      </p:sp>
+      <p:sp>
+        <p:nvSpPr>
+          <p:cNvPr id="32" name="Text 30"/>
+          <p:cNvSpPr/>
+          <p:nvPr/>
+        </p:nvSpPr>
+        <p:spPr>
+          <a:xfrm>
+            <a:off x="6419088" y="3941064"/>
+            <a:ext cx="2157984" cy="950976"/>
           </a:xfrm>
           <a:prstGeom prst="rect">
             <a:avLst/>
@@ -26922,12 +27237,12 @@
           <a:p>
             <a:pPr indent="0" marL="0">
               <a:lnSpc>
-                <a:spcPct val="120000"/>
+                <a:spcPct val="128000"/>
               </a:lnSpc>
               <a:buNone/>
             </a:pPr>
             <a:r>
-              <a:rPr lang="en-US" sz="980" dirty="0">
+              <a:rPr lang="en-US" sz="1030" dirty="0">
                 <a:solidFill>
                   <a:srgbClr val="6B6F80"/>
                 </a:solidFill>
@@ -26937,20 +27252,59 @@
               </a:rPr>
               <a:t>성숙기 IP 재탄생 서사 기반 브랜드 캠페인 및 신규지역 대형 업데이트 연계</a:t>
             </a:r>
-            <a:endParaRPr lang="en-US" sz="980" dirty="0"/>
-          </a:p>
-        </p:txBody>
-      </p:sp>
-      <p:sp>
-        <p:nvSpPr>
-          <p:cNvPr id="21" name="Shape 19"/>
-          <p:cNvSpPr/>
-          <p:nvPr/>
-        </p:nvSpPr>
-        <p:spPr>
-          <a:xfrm>
-            <a:off x="8540496" y="2276856"/>
-            <a:ext cx="201168" cy="201168"/>
+            <a:endParaRPr lang="en-US" sz="1030" dirty="0"/>
+          </a:p>
+        </p:txBody>
+      </p:sp>
+      <p:sp>
+        <p:nvSpPr>
+          <p:cNvPr id="33" name="Text 31"/>
+          <p:cNvSpPr/>
+          <p:nvPr/>
+        </p:nvSpPr>
+        <p:spPr>
+          <a:xfrm>
+            <a:off x="9409176" y="1554480"/>
+            <a:ext cx="1828800" cy="274320"/>
+          </a:xfrm>
+          <a:prstGeom prst="rect">
+            <a:avLst/>
+          </a:prstGeom>
+          <a:noFill/>
+          <a:ln/>
+        </p:spPr>
+        <p:txBody>
+          <a:bodyPr wrap="square" lIns="0" tIns="0" rIns="0" bIns="0" rtlCol="0" anchor="ctr"/>
+          <a:lstStyle/>
+          <a:p>
+            <a:pPr algn="ctr" indent="0" marL="0">
+              <a:buNone/>
+            </a:pPr>
+            <a:r>
+              <a:rPr lang="en-US" sz="1350" b="1" dirty="0">
+                <a:solidFill>
+                  <a:srgbClr val="E8B84B"/>
+                </a:solidFill>
+                <a:latin typeface="Cambria" pitchFamily="34" charset="0"/>
+                <a:ea typeface="Cambria" pitchFamily="34" charset="-122"/>
+                <a:cs typeface="Cambria" pitchFamily="34" charset="-120"/>
+              </a:rPr>
+              <a:t>27 Q2</a:t>
+            </a:r>
+            <a:endParaRPr lang="en-US" sz="1350" dirty="0"/>
+          </a:p>
+        </p:txBody>
+      </p:sp>
+      <p:sp>
+        <p:nvSpPr>
+          <p:cNvPr id="34" name="Shape 32"/>
+          <p:cNvSpPr/>
+          <p:nvPr/>
+        </p:nvSpPr>
+        <p:spPr>
+          <a:xfrm>
+            <a:off x="10213848" y="1810512"/>
+            <a:ext cx="219456" cy="219456"/>
           </a:xfrm>
           <a:prstGeom prst="ellipse">
             <a:avLst/>
@@ -26968,57 +27322,41 @@
       </p:sp>
       <p:sp>
         <p:nvSpPr>
-          <p:cNvPr id="22" name="Text 20"/>
-          <p:cNvSpPr/>
-          <p:nvPr/>
-        </p:nvSpPr>
-        <p:spPr>
-          <a:xfrm>
-            <a:off x="7726680" y="1691640"/>
-            <a:ext cx="2194560" cy="320040"/>
-          </a:xfrm>
-          <a:prstGeom prst="rect">
-            <a:avLst/>
-          </a:prstGeom>
-          <a:noFill/>
-          <a:ln/>
-        </p:spPr>
-        <p:txBody>
-          <a:bodyPr wrap="square" lIns="0" tIns="0" rIns="0" bIns="0" rtlCol="0" anchor="ctr"/>
-          <a:lstStyle/>
-          <a:p>
-            <a:pPr indent="0" marL="0">
-              <a:buNone/>
-            </a:pPr>
-            <a:r>
-              <a:rPr lang="en-US" sz="1400" b="1" dirty="0">
-                <a:solidFill>
-                  <a:srgbClr val="E8B84B"/>
-                </a:solidFill>
-                <a:latin typeface="Cambria" pitchFamily="34" charset="0"/>
-                <a:ea typeface="Cambria" pitchFamily="34" charset="-122"/>
-                <a:cs typeface="Cambria" pitchFamily="34" charset="-120"/>
-              </a:rPr>
-              <a:t>27 Q2</a:t>
-            </a:r>
-            <a:endParaRPr lang="en-US" sz="1400" dirty="0"/>
-          </a:p>
-        </p:txBody>
-      </p:sp>
-      <p:sp>
-        <p:nvSpPr>
-          <p:cNvPr id="23" name="Shape 21"/>
-          <p:cNvSpPr/>
-          <p:nvPr/>
-        </p:nvSpPr>
-        <p:spPr>
-          <a:xfrm>
-            <a:off x="7498080" y="2651760"/>
-            <a:ext cx="2468880" cy="1874520"/>
+          <p:cNvPr id="35" name="Shape 33"/>
+          <p:cNvSpPr/>
+          <p:nvPr/>
+        </p:nvSpPr>
+        <p:spPr>
+          <a:xfrm>
+            <a:off x="10323576" y="2029968"/>
+            <a:ext cx="0" cy="301752"/>
+          </a:xfrm>
+          <a:prstGeom prst="line">
+            <a:avLst/>
+          </a:prstGeom>
+          <a:noFill/>
+          <a:ln w="19050">
+            <a:solidFill>
+              <a:srgbClr val="E1E2E8"/>
+            </a:solidFill>
+            <a:prstDash val="dash"/>
+          </a:ln>
+        </p:spPr>
+      </p:sp>
+      <p:sp>
+        <p:nvSpPr>
+          <p:cNvPr id="36" name="Shape 34"/>
+          <p:cNvSpPr/>
+          <p:nvPr/>
+        </p:nvSpPr>
+        <p:spPr>
+          <a:xfrm>
+            <a:off x="9025128" y="2331720"/>
+            <a:ext cx="2596896" cy="2743200"/>
           </a:xfrm>
           <a:prstGeom prst="roundRect">
             <a:avLst>
-              <a:gd name="adj" fmla="val 3415"/>
+              <a:gd name="adj" fmla="val 2817"/>
             </a:avLst>
           </a:prstGeom>
           <a:solidFill>
@@ -27034,14 +27372,73 @@
       </p:sp>
       <p:sp>
         <p:nvSpPr>
-          <p:cNvPr id="24" name="Text 22"/>
-          <p:cNvSpPr/>
-          <p:nvPr/>
-        </p:nvSpPr>
-        <p:spPr>
-          <a:xfrm>
-            <a:off x="7680960" y="2816352"/>
-            <a:ext cx="2103120" cy="594360"/>
+          <p:cNvPr id="37" name="Shape 35"/>
+          <p:cNvSpPr/>
+          <p:nvPr/>
+        </p:nvSpPr>
+        <p:spPr>
+          <a:xfrm>
+            <a:off x="9244584" y="2532888"/>
+            <a:ext cx="457200" cy="457200"/>
+          </a:xfrm>
+          <a:prstGeom prst="ellipse">
+            <a:avLst/>
+          </a:prstGeom>
+          <a:solidFill>
+            <a:srgbClr val="E8B84B"/>
+          </a:solidFill>
+          <a:ln/>
+        </p:spPr>
+      </p:sp>
+      <p:sp>
+        <p:nvSpPr>
+          <p:cNvPr id="38" name="Text 36"/>
+          <p:cNvSpPr/>
+          <p:nvPr/>
+        </p:nvSpPr>
+        <p:spPr>
+          <a:xfrm>
+            <a:off x="9244584" y="2532888"/>
+            <a:ext cx="457200" cy="457200"/>
+          </a:xfrm>
+          <a:prstGeom prst="rect">
+            <a:avLst/>
+          </a:prstGeom>
+          <a:noFill/>
+          <a:ln/>
+        </p:spPr>
+        <p:txBody>
+          <a:bodyPr wrap="square" lIns="0" tIns="0" rIns="0" bIns="0" rtlCol="0" anchor="ctr"/>
+          <a:lstStyle/>
+          <a:p>
+            <a:pPr algn="ctr" indent="0" marL="0">
+              <a:buNone/>
+            </a:pPr>
+            <a:r>
+              <a:rPr lang="en-US" sz="1800" b="1" dirty="0">
+                <a:solidFill>
+                  <a:srgbClr val="FFFFFF"/>
+                </a:solidFill>
+                <a:latin typeface="Cambria" pitchFamily="34" charset="0"/>
+                <a:ea typeface="Cambria" pitchFamily="34" charset="-122"/>
+                <a:cs typeface="Cambria" pitchFamily="34" charset="-120"/>
+              </a:rPr>
+              <a:t>4</a:t>
+            </a:r>
+            <a:endParaRPr lang="en-US" sz="1800" dirty="0"/>
+          </a:p>
+        </p:txBody>
+      </p:sp>
+      <p:sp>
+        <p:nvSpPr>
+          <p:cNvPr id="39" name="Text 37"/>
+          <p:cNvSpPr/>
+          <p:nvPr/>
+        </p:nvSpPr>
+        <p:spPr>
+          <a:xfrm>
+            <a:off x="9244584" y="3099816"/>
+            <a:ext cx="2157984" cy="658368"/>
           </a:xfrm>
           <a:prstGeom prst="rect">
             <a:avLst/>
@@ -27055,35 +27452,58 @@
           <a:p>
             <a:pPr indent="0" marL="0">
               <a:lnSpc>
-                <a:spcPct val="115000"/>
+                <a:spcPct val="112000"/>
               </a:lnSpc>
               <a:buNone/>
             </a:pPr>
             <a:r>
-              <a:rPr lang="en-US" sz="1250" b="1" dirty="0">
+              <a:rPr lang="en-US" sz="1400" b="1" dirty="0">
                 <a:solidFill>
                   <a:srgbClr val="1C1E29"/>
                 </a:solidFill>
-                <a:latin typeface="Calibri" pitchFamily="34" charset="0"/>
-                <a:ea typeface="Calibri" pitchFamily="34" charset="-122"/>
-                <a:cs typeface="Calibri" pitchFamily="34" charset="-120"/>
+                <a:latin typeface="Cambria" pitchFamily="34" charset="0"/>
+                <a:ea typeface="Cambria" pitchFamily="34" charset="-122"/>
+                <a:cs typeface="Cambria" pitchFamily="34" charset="-120"/>
               </a:rPr>
               <a:t>대시보드 정식 가동</a:t>
             </a:r>
-            <a:endParaRPr lang="en-US" sz="1250" dirty="0"/>
-          </a:p>
-        </p:txBody>
-      </p:sp>
-      <p:sp>
-        <p:nvSpPr>
-          <p:cNvPr id="25" name="Text 23"/>
-          <p:cNvSpPr/>
-          <p:nvPr/>
-        </p:nvSpPr>
-        <p:spPr>
-          <a:xfrm>
-            <a:off x="7680960" y="3429000"/>
-            <a:ext cx="2103120" cy="1005840"/>
+            <a:endParaRPr lang="en-US" sz="1400" dirty="0"/>
+          </a:p>
+        </p:txBody>
+      </p:sp>
+      <p:sp>
+        <p:nvSpPr>
+          <p:cNvPr id="40" name="Shape 38"/>
+          <p:cNvSpPr/>
+          <p:nvPr/>
+        </p:nvSpPr>
+        <p:spPr>
+          <a:xfrm>
+            <a:off x="9244584" y="3813048"/>
+            <a:ext cx="2157984" cy="0"/>
+          </a:xfrm>
+          <a:prstGeom prst="line">
+            <a:avLst/>
+          </a:prstGeom>
+          <a:noFill/>
+          <a:ln w="12700">
+            <a:solidFill>
+              <a:srgbClr val="E7E7EC"/>
+            </a:solidFill>
+            <a:prstDash val="solid"/>
+          </a:ln>
+        </p:spPr>
+      </p:sp>
+      <p:sp>
+        <p:nvSpPr>
+          <p:cNvPr id="41" name="Text 39"/>
+          <p:cNvSpPr/>
+          <p:nvPr/>
+        </p:nvSpPr>
+        <p:spPr>
+          <a:xfrm>
+            <a:off x="9244584" y="3941064"/>
+            <a:ext cx="2157984" cy="950976"/>
           </a:xfrm>
           <a:prstGeom prst="rect">
             <a:avLst/>
@@ -27097,12 +27517,12 @@
           <a:p>
             <a:pPr indent="0" marL="0">
               <a:lnSpc>
-                <a:spcPct val="120000"/>
+                <a:spcPct val="128000"/>
               </a:lnSpc>
               <a:buNone/>
             </a:pPr>
             <a:r>
-              <a:rPr lang="en-US" sz="980" dirty="0">
+              <a:rPr lang="en-US" sz="1030" dirty="0">
                 <a:solidFill>
                   <a:srgbClr val="6B6F80"/>
                 </a:solidFill>
@@ -27112,24 +27532,24 @@
               </a:rPr>
               <a:t>본 보고서의 9개 타일을 실데이터 연동 대시보드로 전환, 효율 지수 자동 갱신</a:t>
             </a:r>
-            <a:endParaRPr lang="en-US" sz="980" dirty="0"/>
-          </a:p>
-        </p:txBody>
-      </p:sp>
-      <p:sp>
-        <p:nvSpPr>
-          <p:cNvPr id="26" name="Shape 24"/>
-          <p:cNvSpPr/>
-          <p:nvPr/>
-        </p:nvSpPr>
-        <p:spPr>
-          <a:xfrm>
-            <a:off x="548640" y="5349240"/>
-            <a:ext cx="11064240" cy="960120"/>
+            <a:endParaRPr lang="en-US" sz="1030" dirty="0"/>
+          </a:p>
+        </p:txBody>
+      </p:sp>
+      <p:sp>
+        <p:nvSpPr>
+          <p:cNvPr id="42" name="Shape 40"/>
+          <p:cNvSpPr/>
+          <p:nvPr/>
+        </p:nvSpPr>
+        <p:spPr>
+          <a:xfrm>
+            <a:off x="548640" y="5257800"/>
+            <a:ext cx="11064240" cy="777240"/>
           </a:xfrm>
           <a:prstGeom prst="roundRect">
             <a:avLst>
-              <a:gd name="adj" fmla="val 5714"/>
+              <a:gd name="adj" fmla="val 7059"/>
             </a:avLst>
           </a:prstGeom>
           <a:solidFill>
@@ -27140,14 +27560,14 @@
       </p:sp>
       <p:sp>
         <p:nvSpPr>
-          <p:cNvPr id="27" name="Text 25"/>
-          <p:cNvSpPr/>
-          <p:nvPr/>
-        </p:nvSpPr>
-        <p:spPr>
-          <a:xfrm>
-            <a:off x="822960" y="5349240"/>
-            <a:ext cx="10515600" cy="960120"/>
+          <p:cNvPr id="43" name="Text 41"/>
+          <p:cNvSpPr/>
+          <p:nvPr/>
+        </p:nvSpPr>
+        <p:spPr>
+          <a:xfrm>
+            <a:off x="822960" y="5257800"/>
+            <a:ext cx="10515600" cy="777240"/>
           </a:xfrm>
           <a:prstGeom prst="rect">
             <a:avLst/>
@@ -27160,10 +27580,30 @@
           <a:lstStyle/>
           <a:p>
             <a:pPr indent="0" marL="0">
-              <a:buNone/>
-            </a:pPr>
-            <a:r>
-              <a:rPr lang="en-US" sz="1250" dirty="0">
+              <a:lnSpc>
+                <a:spcPct val="125000"/>
+              </a:lnSpc>
+              <a:buNone/>
+            </a:pPr>
+            <a:r>
+              <a:rPr lang="en-US" sz="1200" b="1" dirty="0">
+                <a:solidFill>
+                  <a:srgbClr val="E8B84B"/>
+                </a:solidFill>
+                <a:latin typeface="Calibri" pitchFamily="34" charset="0"/>
+                <a:ea typeface="Calibri" pitchFamily="34" charset="-122"/>
+                <a:cs typeface="Calibri" pitchFamily="34" charset="-120"/>
+              </a:rPr>
+              <a:t>KPI 목표  </a:t>
+            </a:r>
+            <a:pPr indent="0" marL="0">
+              <a:lnSpc>
+                <a:spcPct val="125000"/>
+              </a:lnSpc>
+              <a:buNone/>
+            </a:pPr>
+            <a:r>
+              <a:rPr lang="en-US" sz="1200" dirty="0">
                 <a:solidFill>
                   <a:srgbClr val="E8E9F0"/>
                 </a:solidFill>
@@ -27171,9 +27611,9 @@
                 <a:ea typeface="Calibri" pitchFamily="34" charset="-122"/>
                 <a:cs typeface="Calibri" pitchFamily="34" charset="-120"/>
               </a:rPr>
-              <a:t>KPI 목표 — 매출순위 Top30 이내 90% 이상 유지, 이용자순위 변동폭 ±15 이내 안정화, 타이틀 단위 실측 CPI 체계 2027 Q1 내 구축</a:t>
-            </a:r>
-            <a:endParaRPr lang="en-US" sz="1250" dirty="0"/>
+              <a:t>구글 플레이스토어 순위 Top30 이내 90% 이상 유지 · 이용자순위 변동폭 ±15 이내 안정화 · 타이틀 단위 실측 CPI 체계 2027 Q1 내 구축</a:t>
+            </a:r>
+            <a:endParaRPr lang="en-US" sz="1200" dirty="0"/>
           </a:p>
         </p:txBody>
       </p:sp>
@@ -27991,7 +28431,7 @@
                 <a:ea typeface="Calibri" pitchFamily="34" charset="-122"/>
                 <a:cs typeface="Calibri" pitchFamily="34" charset="-120"/>
               </a:rPr>
-              <a:t>매출순위 추이</a:t>
+              <a:t>구글 플레이스토어 순위 추이</a:t>
             </a:r>
             <a:endParaRPr lang="en-US" sz="980" dirty="0"/>
           </a:p>
@@ -28535,7 +28975,7 @@
                 <a:ea typeface="Calibri" pitchFamily="34" charset="-122"/>
                 <a:cs typeface="Calibri" pitchFamily="34" charset="-120"/>
               </a:rPr>
-              <a:t>메이플M 기준 매출순위 격차</a:t>
+              <a:t>메이플M 기준 구글플레이스토어 순위 격차</a:t>
             </a:r>
             <a:endParaRPr lang="en-US" sz="980" dirty="0"/>
           </a:p>
@@ -30840,7 +31280,7 @@
                 <a:ea typeface="Calibri" pitchFamily="34" charset="-122"/>
                 <a:cs typeface="Calibri" pitchFamily="34" charset="-120"/>
               </a:rPr>
-              <a:t>매출순위·이용자순위 주간 추이</a:t>
+              <a:t>구글 플레이스토어 순위·이용자순위 주간 추이</a:t>
             </a:r>
             <a:endParaRPr lang="en-US" sz="1150" dirty="0"/>
           </a:p>
@@ -32412,7 +32852,7 @@
                 <a:ea typeface="Calibri" pitchFamily="34" charset="-122"/>
                 <a:cs typeface="Calibri" pitchFamily="34" charset="-120"/>
               </a:rPr>
-              <a:t>매출순위 · 이용자순위</a:t>
+              <a:t>구글 플레이스토어 순위 · 이용자순위</a:t>
             </a:r>
             <a:endParaRPr lang="en-US" sz="1150" dirty="0"/>
           </a:p>
@@ -32454,7 +32894,7 @@
                 <a:ea typeface="Calibri" pitchFamily="34" charset="-122"/>
                 <a:cs typeface="Calibri" pitchFamily="34" charset="-120"/>
               </a:rPr>
-              <a:t>앱마켓 매출·이용자 지표 기준 주간 순위 (숫자가 낮을수록 상위)</a:t>
+              <a:t>구글 플레이스토어 앱마켓 순위·이용자 지표 기준 주간 순위 (숫자가 낮을수록 상위)</a:t>
             </a:r>
             <a:endParaRPr lang="en-US" sz="1000" dirty="0"/>
           </a:p>
@@ -33641,7 +34081,7 @@
                 <a:ea typeface="Calibri" pitchFamily="34" charset="-122"/>
                 <a:cs typeface="Calibri" pitchFamily="34" charset="-120"/>
               </a:rPr>
-              <a:t>광고비 증감 방향 × 매출순위·실적 개선 방향의 교차 분류 (4분면: 지출↑성과↑ / 지출↑성과↓ / 지출↓성과↑ / 지출↓성과↓)</a:t>
+              <a:t>광고비 증감 방향 × 구글 플레이스토어 순위·실적 개선 방향의 교차 분류 (4분면: 지출↑성과↑ / 지출↑성과↓ / 지출↓성과↑ / 지출↓성과↓)</a:t>
             </a:r>
             <a:endParaRPr lang="en-US" sz="980" dirty="0"/>
           </a:p>
@@ -33683,7 +34123,7 @@
                 <a:ea typeface="Calibri" pitchFamily="34" charset="-122"/>
                 <a:cs typeface="Calibri" pitchFamily="34" charset="-120"/>
               </a:rPr>
-              <a:t>위 광고비 YoY + 매출순위·재무실적 변화</a:t>
+              <a:t>위 광고비 YoY + 구글 플레이스토어 순위·재무실적 변화</a:t>
             </a:r>
             <a:endParaRPr lang="en-US" sz="980" dirty="0"/>
           </a:p>
@@ -34736,7 +35176,7 @@
                 <a:ea typeface="Calibri" pitchFamily="34" charset="-122"/>
                 <a:cs typeface="Calibri" pitchFamily="34" charset="-120"/>
               </a:rPr>
-              <a:t>이용자순위 3월, 매출순위 7월 이후 트래킹 이탈</a:t>
+              <a:t>이용자순위 3월, 구글 플레이스토어 순위 7월 이후 트래킹 이탈</a:t>
             </a:r>
             <a:endParaRPr lang="en-US" sz="1060" dirty="0"/>
           </a:p>

--- a/output/메이플스토리M_UA마케팅효율_분석보고서.pptx
+++ b/output/메이플스토리M_UA마케팅효율_분석보고서.pptx
@@ -1884,7 +1884,7 @@
         <c:axId val="2094734552"/>
         <c:scaling>
           <c:orientation val="minMax"/>
-          <c:max val="60"/>
+          <c:max val="100"/>
           <c:min val="0"/>
         </c:scaling>
         <c:delete val="0"/>
@@ -1958,7 +1958,7 @@
         <c:crossAx val="2094734554"/>
         <c:crosses val="autoZero"/>
         <c:crossBetween val="between"/>
-        <c:majorUnit val="10"/>
+        <c:majorUnit val="20"/>
       </c:valAx>
       <c:spPr>
         <a:noFill/>
@@ -3264,7 +3264,7 @@
         <c:axId val="2094734552"/>
         <c:scaling>
           <c:orientation val="minMax"/>
-          <c:max val="70"/>
+          <c:max val="100"/>
           <c:min val="0"/>
         </c:scaling>
         <c:delete val="0"/>
@@ -3338,7 +3338,7 @@
         <c:crossAx val="2094734554"/>
         <c:crosses val="autoZero"/>
         <c:crossBetween val="between"/>
-        <c:majorUnit val="10"/>
+        <c:majorUnit val="20"/>
       </c:valAx>
       <c:spPr>
         <a:noFill/>
